--- a/10-plantas/01-steelmaking/05-capacitacion/MM-EAF-03/MM-EAF-03_Capacitacion_AMMX.pptx
+++ b/10-plantas/01-steelmaking/05-capacitacion/MM-EAF-03/MM-EAF-03_Capacitacion_AMMX.pptx
@@ -3583,7 +3583,7 @@
                 <a:ea typeface="Century Gothic" pitchFamily="34" charset="-122"/>
                 <a:cs typeface="Century Gothic" pitchFamily="34" charset="-120"/>
               </a:rPr>
-              <a:t>Para: S-24 Refractarista · S-03 Ayudante de Horno · S-20 Electricista · S-04 Grúa de Carga · C-15 · C-05</a:t>
+              <a:t>Para: S-24 Refractarista · S-03 Ayudante de Horno · S-01 Primer Hornero · S-19 Mecánico · S-20 Electricista · S-04 Grúa de Carga · C-15 · C-05</a:t>
             </a:r>
             <a:endParaRPr lang="en-US" sz="1100" dirty="0"/>
           </a:p>
@@ -19356,7 +19356,7 @@
                 <a:ea typeface="Calibri" pitchFamily="34" charset="-122"/>
                 <a:cs typeface="Calibri" pitchFamily="34" charset="-120"/>
               </a:rPr>
-              <a:t>Siguiente paso: OJT supervisado y evaluación práctica (TD-P07); registro en IMaS y DC-3/SIRCE. Validación: pendiente.</a:t>
+              <a:t>Siguiente paso: OJT supervisado y evaluación práctica (TD-P07); registro en IMaS y DC-3/SIRCE. Validación: visto bueno técnica, seguridad, laboral, diseño instruccional.</a:t>
             </a:r>
             <a:endParaRPr lang="en-US" sz="750" dirty="0"/>
           </a:p>
